--- a/data/courses/FBE_2026/slides/FBE_2026_04_Wrapup.pptx
+++ b/data/courses/FBE_2026/slides/FBE_2026_04_Wrapup.pptx
@@ -4,15 +4,15 @@
   <p:sldMasterIdLst>
     <p:sldMasterId id="2147483648" r:id="rId1"/>
   </p:sldMasterIdLst>
+  <p:notesMasterIdLst>
+    <p:notesMasterId r:id="rId6"/>
+  </p:notesMasterIdLst>
   <p:sldIdLst>
     <p:sldId id="256" r:id="rId2"/>
     <p:sldId id="257" r:id="rId3"/>
     <p:sldId id="258" r:id="rId4"/>
     <p:sldId id="259" r:id="rId5"/>
   </p:sldIdLst>
-  <p:notesMasterIdLst>
-    <p:notesMasterId r:id="rId6"/>
-  </p:notesMasterIdLst>
   <p:sldSz cx="12192000" cy="6858000"/>
   <p:notesSz cx="6858000" cy="12192000"/>
   <p:defaultTextStyle>
@@ -107,6 +107,11 @@
       </a:defRPr>
     </a:lvl9pPr>
   </p:defaultTextStyle>
+  <p:extLst>
+    <p:ext uri="{EFAFB233-063F-42B5-8137-9DF3F51BA10A}">
+      <p15:sldGuideLst xmlns:p15="http://schemas.microsoft.com/office/powerpoint/2012/main"/>
+    </p:ext>
+  </p:extLst>
 </p:presentation>
 </file>
 
@@ -132,234 +137,10 @@
           <a:chExt cx="0" cy="0"/>
         </a:xfrm>
       </p:grpSpPr>
-      <p:sp>
-        <p:nvSpPr>
-          <p:cNvPr id="2" name="Header Placeholder 1"/>
-          <p:cNvSpPr>
-            <a:spLocks noGrp="1"/>
-          </p:cNvSpPr>
-          <p:nvPr>
-            <p:ph type="hdr" sz="quarter"/>
-          </p:nvPr>
-        </p:nvSpPr>
-        <p:spPr>
-          <a:xfrm>
-            <a:off x="0" y="0"/>
-            <a:ext cx="2971800" cy="458788"/>
-          </a:xfrm>
-          <a:prstGeom prst="rect">
-            <a:avLst/>
-          </a:prstGeom>
-        </p:spPr>
-        <p:txBody>
-          <a:bodyPr vert="horz" lIns="91440" tIns="45720" rIns="91440" bIns="45720" rtlCol="0"/>
-          <a:lstStyle>
-            <a:lvl1pPr algn="l">
-              <a:defRPr sz="1200"/>
-            </a:lvl1pPr>
-          </a:lstStyle>
-          <a:p>
-            <a:endParaRPr lang="en-US"/>
-          </a:p>
-        </p:txBody>
-      </p:sp>
-      <p:sp>
-        <p:nvSpPr>
-          <p:cNvPr id="3" name="Date Placeholder 2"/>
-          <p:cNvSpPr>
-            <a:spLocks noGrp="1"/>
-          </p:cNvSpPr>
-          <p:nvPr>
-            <p:ph type="dt" idx="1"/>
-          </p:nvPr>
-        </p:nvSpPr>
-        <p:spPr>
-          <a:xfrm>
-            <a:off x="3884613" y="0"/>
-            <a:ext cx="2971800" cy="458788"/>
-          </a:xfrm>
-          <a:prstGeom prst="rect">
-            <a:avLst/>
-          </a:prstGeom>
-        </p:spPr>
-        <p:txBody>
-          <a:bodyPr vert="horz" lIns="91440" tIns="45720" rIns="91440" bIns="45720" rtlCol="0"/>
-          <a:lstStyle>
-            <a:lvl1pPr algn="r">
-              <a:defRPr sz="1200"/>
-            </a:lvl1pPr>
-          </a:lstStyle>
-          <a:p>
-            <a:fld id="{5282F153-3F37-0F45-9E97-73ACFA13230C}" type="datetimeFigureOut">
-              <a:rPr lang="en-US"/>
-              <a:t>7/23/19</a:t>
-            </a:fld>
-            <a:endParaRPr lang="en-US"/>
-          </a:p>
-        </p:txBody>
-      </p:sp>
-      <p:sp>
-        <p:nvSpPr>
-          <p:cNvPr id="4" name="Slide Image Placeholder 3"/>
-          <p:cNvSpPr>
-            <a:spLocks noGrp="1" noRot="1" noChangeAspect="1"/>
-          </p:cNvSpPr>
-          <p:nvPr>
-            <p:ph type="sldImg" idx="2"/>
-          </p:nvPr>
-        </p:nvSpPr>
-        <p:spPr>
-          <a:xfrm>
-            <a:off x="685800" y="1143000"/>
-            <a:ext cx="5486400" cy="3086100"/>
-          </a:xfrm>
-          <a:prstGeom prst="rect">
-            <a:avLst/>
-          </a:prstGeom>
-          <a:noFill/>
-          <a:ln w="12700">
-            <a:solidFill>
-              <a:prstClr val="black"/>
-            </a:solidFill>
-          </a:ln>
-        </p:spPr>
-        <p:txBody>
-          <a:bodyPr vert="horz" lIns="91440" tIns="45720" rIns="91440" bIns="45720" rtlCol="0" anchor="ctr"/>
-          <a:lstStyle/>
-          <a:p>
-            <a:endParaRPr lang="en-US"/>
-          </a:p>
-        </p:txBody>
-      </p:sp>
-      <p:sp>
-        <p:nvSpPr>
-          <p:cNvPr id="5" name="Notes Placeholder 4"/>
-          <p:cNvSpPr>
-            <a:spLocks noGrp="1"/>
-          </p:cNvSpPr>
-          <p:nvPr>
-            <p:ph type="body" sz="quarter" idx="3"/>
-          </p:nvPr>
-        </p:nvSpPr>
-        <p:spPr>
-          <a:xfrm>
-            <a:off x="685800" y="4400550"/>
-            <a:ext cx="5486400" cy="3600450"/>
-          </a:xfrm>
-          <a:prstGeom prst="rect">
-            <a:avLst/>
-          </a:prstGeom>
-        </p:spPr>
-        <p:txBody>
-          <a:bodyPr vert="horz" lIns="91440" tIns="45720" rIns="91440" bIns="45720" rtlCol="0"/>
-          <a:lstStyle/>
-          <a:p>
-            <a:pPr lvl="0"/>
-            <a:r>
-              <a:rPr lang="en-US"/>
-              <a:t>Click to edit Master text styles</a:t>
-            </a:r>
-          </a:p>
-          <a:p>
-            <a:pPr lvl="1"/>
-            <a:r>
-              <a:rPr lang="en-US"/>
-              <a:t>Second level</a:t>
-            </a:r>
-          </a:p>
-          <a:p>
-            <a:pPr lvl="2"/>
-            <a:r>
-              <a:rPr lang="en-US"/>
-              <a:t>Third level</a:t>
-            </a:r>
-          </a:p>
-          <a:p>
-            <a:pPr lvl="3"/>
-            <a:r>
-              <a:rPr lang="en-US"/>
-              <a:t>Fourth level</a:t>
-            </a:r>
-          </a:p>
-          <a:p>
-            <a:pPr lvl="4"/>
-            <a:r>
-              <a:rPr lang="en-US"/>
-              <a:t>Fifth level</a:t>
-            </a:r>
-          </a:p>
-        </p:txBody>
-      </p:sp>
-      <p:sp>
-        <p:nvSpPr>
-          <p:cNvPr id="6" name="Footer Placeholder 5"/>
-          <p:cNvSpPr>
-            <a:spLocks noGrp="1"/>
-          </p:cNvSpPr>
-          <p:nvPr>
-            <p:ph type="ftr" sz="quarter" idx="4"/>
-          </p:nvPr>
-        </p:nvSpPr>
-        <p:spPr>
-          <a:xfrm>
-            <a:off x="0" y="8685213"/>
-            <a:ext cx="2971800" cy="458787"/>
-          </a:xfrm>
-          <a:prstGeom prst="rect">
-            <a:avLst/>
-          </a:prstGeom>
-        </p:spPr>
-        <p:txBody>
-          <a:bodyPr vert="horz" lIns="91440" tIns="45720" rIns="91440" bIns="45720" rtlCol="0" anchor="b"/>
-          <a:lstStyle>
-            <a:lvl1pPr algn="l">
-              <a:defRPr sz="1200"/>
-            </a:lvl1pPr>
-          </a:lstStyle>
-          <a:p>
-            <a:endParaRPr lang="en-US"/>
-          </a:p>
-        </p:txBody>
-      </p:sp>
-      <p:sp>
-        <p:nvSpPr>
-          <p:cNvPr id="7" name="Slide Number Placeholder 6"/>
-          <p:cNvSpPr>
-            <a:spLocks noGrp="1"/>
-          </p:cNvSpPr>
-          <p:nvPr>
-            <p:ph type="sldNum" sz="quarter" idx="5"/>
-          </p:nvPr>
-        </p:nvSpPr>
-        <p:spPr>
-          <a:xfrm>
-            <a:off x="3884613" y="8685213"/>
-            <a:ext cx="2971800" cy="458787"/>
-          </a:xfrm>
-          <a:prstGeom prst="rect">
-            <a:avLst/>
-          </a:prstGeom>
-        </p:spPr>
-        <p:txBody>
-          <a:bodyPr vert="horz" lIns="91440" tIns="45720" rIns="91440" bIns="45720" rtlCol="0" anchor="b"/>
-          <a:lstStyle>
-            <a:lvl1pPr algn="r">
-              <a:defRPr sz="1200"/>
-            </a:lvl1pPr>
-          </a:lstStyle>
-          <a:p>
-            <a:fld id="{CE5E9CC1-C706-0F49-92D6-E571CC5EEA8F}" type="slidenum">
-              <a:rPr lang="en-US"/>
-              <a:t>‹#›</a:t>
-            </a:fld>
-            <a:endParaRPr lang="en-US"/>
-          </a:p>
-        </p:txBody>
-      </p:sp>
     </p:spTree>
     <p:extLst>
       <p:ext uri="{BB962C8B-B14F-4D97-AF65-F5344CB8AC3E}">
-        <p14:creationId xmlns:p14="http://schemas.microsoft.com/office/powerpoint/2010/main" val="1024086991"/>
+        <p14:creationId xmlns:p14="http://schemas.microsoft.com/office/powerpoint/2010/main" val="4231645997"/>
       </p:ext>
     </p:extLst>
   </p:cSld>
@@ -503,15 +284,6 @@
           <a:bodyPr/>
           <a:lstStyle/>
           <a:p>
-            <a:r>
-              <a:rPr lang="en-US" dirty="0"/>
-              <a:t>Five messages for the whole afternoon.
-One: traits describe what organisms do, and allow comparisons across communities that share no species.
-Two: a functional space is a construction — traits, distance, ordination, number of axes — and every choice must be justified and tested.
-Three: there is no single "functional diversity", and no observed value is meaningful without a null expectation; choose the index from the question and compare with chance.
-Four: rare and threatened species hold a disproportionate share of unique functions; the functional consequences of extinctions are real, measurable, and not the same everywhere.
-Five: traits are properties of individuals; intraspecific variability is large, structured, and matters for coexistence, functioning and conservation — the species mean is a choice, not a fact.</a:t>
-            </a:r>
             <a:endParaRPr lang="en-US" dirty="0"/>
           </a:p>
         </p:txBody>
@@ -596,11 +368,6 @@
           <a:bodyPr/>
           <a:lstStyle/>
           <a:p>
-            <a:r>
-              <a:rPr lang="en-US" dirty="0"/>
-              <a:t>Now the practical. On Thursday you will work in three groups, each on one step of the road map and on a different pair of biogeographic realms. Group A builds and reads a functional space for Neotropical and Nearctic fishes. Group B computes CWM and the functional diversity indices for Palearctic and Ethiopian assemblages and relates them to temperature — the exercise sheet and the background notes give you the details of the indices that I only summarised today. Group C runs the null model for Oriental and Australian assemblages and interprets the SES. Each group has an exercise sheet with guided code and interpretation questions, and a starter script that runs from start to end — so nobody will be blocked by code; your time should go to interpretation.
-At 15:50 each group presents five slides in eight minutes: question, key figure, results, interpretation, one limitation. Take notes during the other groups' presentations, because the written exam at 16:25 — thirty-five minutes, open book, no R — covers all three exercises: the richness confound and the SES, the reading of SES patterns, and why functional diversity matters for conservation.</a:t>
-            </a:r>
             <a:endParaRPr lang="en-US" dirty="0"/>
           </a:p>
         </p:txBody>
@@ -685,10 +452,6 @@
           <a:bodyPr/>
           <a:lstStyle/>
           <a:p>
-            <a:r>
-              <a:rPr lang="en-US" dirty="0"/>
-              <a:t>Two things to do before Thursday. Install the packages — the line is on the course page; run it tonight, not Thursday at two o'clock, because FD compiles a few dependencies and this can take a minute or fail on an old R. And download your group folder, open the starter script and check that the first lines — reading the three CSV files — run without error. If anything fails, write to me before Thursday.</a:t>
-            </a:r>
             <a:endParaRPr lang="en-US" dirty="0"/>
           </a:p>
         </p:txBody>
@@ -773,12 +536,6 @@
           <a:bodyPr/>
           <a:lstStyle/>
           <a:p>
-            <a:r>
-              <a:rPr lang="en-US" dirty="0"/>
-              <a:t>We have ten minutes for questions. And if you want to read one thing before Thursday, read the Villéger 2017 review on the functional ecology of fish: it contains, in twenty pages, everything we did today, with the fish examples. If the last block caught your interest, Bolnick and colleagues 2011 is the paper to start with.
---- INSTRUCTOR NOTE ---
-Constitute the groups before the students leave (list on the slide or by drawing lots), hand out the exercise sheets, and make sure each group has at least one confident R user.</a:t>
-            </a:r>
             <a:endParaRPr lang="en-US" dirty="0"/>
           </a:p>
         </p:txBody>
@@ -852,6 +609,11 @@
 <file path=ppt/slideMasters/slideMaster1.xml><?xml version="1.0" encoding="utf-8"?>
 <p:sldMaster xmlns:a="http://schemas.openxmlformats.org/drawingml/2006/main" xmlns:r="http://schemas.openxmlformats.org/officeDocument/2006/relationships" xmlns:p="http://schemas.openxmlformats.org/presentationml/2006/main">
   <p:cSld>
+    <p:bg>
+      <p:bgRef idx="1001">
+        <a:schemeClr val="bg1"/>
+      </p:bgRef>
+    </p:bg>
     <p:spTree>
       <p:nvGrpSpPr>
         <p:cNvPr id="1" name=""/>
@@ -1134,6 +896,7 @@
         <a:solidFill>
           <a:srgbClr val="FFFFFF"/>
         </a:solidFill>
+        <a:effectLst/>
       </p:bgPr>
     </p:bg>
     <p:spTree>
@@ -1171,7 +934,7 @@
           <a:bodyPr wrap="square" lIns="0" tIns="0" rIns="0" bIns="0" rtlCol="0" anchor="ctr"/>
           <a:lstStyle/>
           <a:p>
-            <a:pPr indent="0" marL="0">
+            <a:pPr marL="0" indent="0">
               <a:buNone/>
             </a:pPr>
             <a:r>
@@ -1210,7 +973,7 @@
           <a:bodyPr wrap="square" lIns="0" tIns="0" rIns="0" bIns="0" rtlCol="0" anchor="ctr"/>
           <a:lstStyle/>
           <a:p>
-            <a:pPr indent="0" marL="0">
+            <a:pPr marL="0" indent="0">
               <a:buNone/>
             </a:pPr>
             <a:r>
@@ -1249,7 +1012,7 @@
           <a:bodyPr wrap="square" lIns="0" tIns="0" rIns="0" bIns="0" rtlCol="0" anchor="ctr"/>
           <a:lstStyle/>
           <a:p>
-            <a:pPr algn="r" indent="0" marL="0">
+            <a:pPr marL="0" indent="0" algn="r">
               <a:buNone/>
             </a:pPr>
             <a:r>
@@ -1293,6 +1056,13 @@
             <a:prstDash val="solid"/>
           </a:ln>
         </p:spPr>
+        <p:txBody>
+          <a:bodyPr/>
+          <a:lstStyle/>
+          <a:p>
+            <a:endParaRPr lang="en-GB"/>
+          </a:p>
+        </p:txBody>
       </p:sp>
       <p:sp>
         <p:nvSpPr>
@@ -1315,7 +1085,7 @@
           <a:bodyPr wrap="square" lIns="25400" tIns="25400" rIns="25400" bIns="25400" rtlCol="0" anchor="ctr"/>
           <a:lstStyle/>
           <a:p>
-            <a:pPr algn="ctr" indent="0" marL="0">
+            <a:pPr marL="0" indent="0" algn="ctr">
               <a:buNone/>
             </a:pPr>
             <a:r>
@@ -1354,7 +1124,7 @@
           <a:bodyPr wrap="square" lIns="0" tIns="0" rIns="0" bIns="0" rtlCol="0" anchor="ctr"/>
           <a:lstStyle/>
           <a:p>
-            <a:pPr indent="0" marL="0">
+            <a:pPr marL="0" indent="0">
               <a:buNone/>
             </a:pPr>
             <a:r>
@@ -1398,6 +1168,13 @@
             <a:prstDash val="solid"/>
           </a:ln>
         </p:spPr>
+        <p:txBody>
+          <a:bodyPr/>
+          <a:lstStyle/>
+          <a:p>
+            <a:endParaRPr lang="en-GB"/>
+          </a:p>
+        </p:txBody>
       </p:sp>
       <p:sp>
         <p:nvSpPr>
@@ -1420,7 +1197,7 @@
           <a:bodyPr wrap="square" lIns="25400" tIns="25400" rIns="25400" bIns="25400" rtlCol="0" anchor="ctr"/>
           <a:lstStyle/>
           <a:p>
-            <a:pPr algn="ctr" indent="0" marL="0">
+            <a:pPr marL="0" indent="0" algn="ctr">
               <a:buNone/>
             </a:pPr>
             <a:r>
@@ -1459,7 +1236,7 @@
           <a:bodyPr wrap="square" lIns="0" tIns="0" rIns="0" bIns="0" rtlCol="0" anchor="ctr"/>
           <a:lstStyle/>
           <a:p>
-            <a:pPr indent="0" marL="0">
+            <a:pPr marL="0" indent="0">
               <a:buNone/>
             </a:pPr>
             <a:r>
@@ -1503,6 +1280,13 @@
             <a:prstDash val="solid"/>
           </a:ln>
         </p:spPr>
+        <p:txBody>
+          <a:bodyPr/>
+          <a:lstStyle/>
+          <a:p>
+            <a:endParaRPr lang="en-GB"/>
+          </a:p>
+        </p:txBody>
       </p:sp>
       <p:sp>
         <p:nvSpPr>
@@ -1525,7 +1309,7 @@
           <a:bodyPr wrap="square" lIns="25400" tIns="25400" rIns="25400" bIns="25400" rtlCol="0" anchor="ctr"/>
           <a:lstStyle/>
           <a:p>
-            <a:pPr algn="ctr" indent="0" marL="0">
+            <a:pPr marL="0" indent="0" algn="ctr">
               <a:buNone/>
             </a:pPr>
             <a:r>
@@ -1564,7 +1348,7 @@
           <a:bodyPr wrap="square" lIns="0" tIns="0" rIns="0" bIns="0" rtlCol="0" anchor="ctr"/>
           <a:lstStyle/>
           <a:p>
-            <a:pPr indent="0" marL="0">
+            <a:pPr marL="0" indent="0">
               <a:buNone/>
             </a:pPr>
             <a:r>
@@ -1608,6 +1392,13 @@
             <a:prstDash val="solid"/>
           </a:ln>
         </p:spPr>
+        <p:txBody>
+          <a:bodyPr/>
+          <a:lstStyle/>
+          <a:p>
+            <a:endParaRPr lang="en-GB"/>
+          </a:p>
+        </p:txBody>
       </p:sp>
       <p:sp>
         <p:nvSpPr>
@@ -1630,7 +1421,7 @@
           <a:bodyPr wrap="square" lIns="25400" tIns="25400" rIns="25400" bIns="25400" rtlCol="0" anchor="ctr"/>
           <a:lstStyle/>
           <a:p>
-            <a:pPr algn="ctr" indent="0" marL="0">
+            <a:pPr marL="0" indent="0" algn="ctr">
               <a:buNone/>
             </a:pPr>
             <a:r>
@@ -1669,7 +1460,7 @@
           <a:bodyPr wrap="square" lIns="0" tIns="0" rIns="0" bIns="0" rtlCol="0" anchor="ctr"/>
           <a:lstStyle/>
           <a:p>
-            <a:pPr indent="0" marL="0">
+            <a:pPr marL="0" indent="0">
               <a:buNone/>
             </a:pPr>
             <a:r>
@@ -1713,6 +1504,13 @@
             <a:prstDash val="solid"/>
           </a:ln>
         </p:spPr>
+        <p:txBody>
+          <a:bodyPr/>
+          <a:lstStyle/>
+          <a:p>
+            <a:endParaRPr lang="en-GB"/>
+          </a:p>
+        </p:txBody>
       </p:sp>
       <p:sp>
         <p:nvSpPr>
@@ -1735,7 +1533,7 @@
           <a:bodyPr wrap="square" lIns="25400" tIns="25400" rIns="25400" bIns="25400" rtlCol="0" anchor="ctr"/>
           <a:lstStyle/>
           <a:p>
-            <a:pPr algn="ctr" indent="0" marL="0">
+            <a:pPr marL="0" indent="0" algn="ctr">
               <a:buNone/>
             </a:pPr>
             <a:r>
@@ -1774,7 +1572,7 @@
           <a:bodyPr wrap="square" lIns="0" tIns="0" rIns="0" bIns="0" rtlCol="0" anchor="ctr"/>
           <a:lstStyle/>
           <a:p>
-            <a:pPr indent="0" marL="0">
+            <a:pPr marL="0" indent="0">
               <a:buNone/>
             </a:pPr>
             <a:r>
@@ -1808,6 +1606,7 @@
         <a:solidFill>
           <a:srgbClr val="FFFFFF"/>
         </a:solidFill>
+        <a:effectLst/>
       </p:bgPr>
     </p:bg>
     <p:spTree>
@@ -1845,7 +1644,7 @@
           <a:bodyPr wrap="square" lIns="0" tIns="0" rIns="0" bIns="0" rtlCol="0" anchor="ctr"/>
           <a:lstStyle/>
           <a:p>
-            <a:pPr indent="0" marL="0">
+            <a:pPr marL="0" indent="0">
               <a:buNone/>
             </a:pPr>
             <a:r>
@@ -1884,7 +1683,7 @@
           <a:bodyPr wrap="square" lIns="0" tIns="0" rIns="0" bIns="0" rtlCol="0" anchor="ctr"/>
           <a:lstStyle/>
           <a:p>
-            <a:pPr indent="0" marL="0">
+            <a:pPr marL="0" indent="0">
               <a:buNone/>
             </a:pPr>
             <a:r>
@@ -1923,7 +1722,7 @@
           <a:bodyPr wrap="square" lIns="0" tIns="0" rIns="0" bIns="0" rtlCol="0" anchor="ctr"/>
           <a:lstStyle/>
           <a:p>
-            <a:pPr algn="r" indent="0" marL="0">
+            <a:pPr marL="0" indent="0" algn="r">
               <a:buNone/>
             </a:pPr>
             <a:r>
@@ -1943,7 +1742,7 @@
       </p:sp>
       <p:graphicFrame>
         <p:nvGraphicFramePr>
-          <p:cNvPr id="3" name="Table 0"/>
+          <p:cNvPr id="6" name="Table 0"/>
           <p:cNvGraphicFramePr>
             <a:graphicFrameLocks noGrp="1"/>
           </p:cNvGraphicFramePr>
@@ -1957,17 +1756,41 @@
         </p:nvGraphicFramePr>
         <p:xfrm>
           <a:off x="548640" y="1371600"/>
-          <a:ext cx="11091672" cy="914400"/>
+          <a:ext cx="11091672" cy="2194560"/>
         </p:xfrm>
         <a:graphic>
           <a:graphicData uri="http://schemas.openxmlformats.org/drawingml/2006/table">
             <a:tbl>
               <a:tblPr/>
               <a:tblGrid>
-                <a:gridCol w="822960"/>
-                <a:gridCol w="4937760"/>
-                <a:gridCol w="2377440"/>
-                <a:gridCol w="2953512"/>
+                <a:gridCol w="822960">
+                  <a:extLst>
+                    <a:ext uri="{9D8B030D-6E8A-4147-A177-3AD203B41FA5}">
+                      <a16:colId xmlns:a16="http://schemas.microsoft.com/office/drawing/2014/main" val="20000"/>
+                    </a:ext>
+                  </a:extLst>
+                </a:gridCol>
+                <a:gridCol w="4937760">
+                  <a:extLst>
+                    <a:ext uri="{9D8B030D-6E8A-4147-A177-3AD203B41FA5}">
+                      <a16:colId xmlns:a16="http://schemas.microsoft.com/office/drawing/2014/main" val="20001"/>
+                    </a:ext>
+                  </a:extLst>
+                </a:gridCol>
+                <a:gridCol w="2377440">
+                  <a:extLst>
+                    <a:ext uri="{9D8B030D-6E8A-4147-A177-3AD203B41FA5}">
+                      <a16:colId xmlns:a16="http://schemas.microsoft.com/office/drawing/2014/main" val="20002"/>
+                    </a:ext>
+                  </a:extLst>
+                </a:gridCol>
+                <a:gridCol w="2953512">
+                  <a:extLst>
+                    <a:ext uri="{9D8B030D-6E8A-4147-A177-3AD203B41FA5}">
+                      <a16:colId xmlns:a16="http://schemas.microsoft.com/office/drawing/2014/main" val="20003"/>
+                    </a:ext>
+                  </a:extLst>
+                </a:gridCol>
               </a:tblGrid>
               <a:tr h="548640">
                 <a:tc>
@@ -1975,7 +1798,7 @@
                     <a:bodyPr/>
                     <a:lstStyle/>
                     <a:p>
-                      <a:pPr indent="0" marL="0">
+                      <a:pPr marL="0" indent="0">
                         <a:buNone/>
                       </a:pPr>
                       <a:r>
@@ -2043,7 +1866,7 @@
                     <a:bodyPr/>
                     <a:lstStyle/>
                     <a:p>
-                      <a:pPr indent="0" marL="0">
+                      <a:pPr marL="0" indent="0">
                         <a:buNone/>
                       </a:pPr>
                       <a:r>
@@ -2111,7 +1934,7 @@
                     <a:bodyPr/>
                     <a:lstStyle/>
                     <a:p>
-                      <a:pPr indent="0" marL="0">
+                      <a:pPr marL="0" indent="0">
                         <a:buNone/>
                       </a:pPr>
                       <a:r>
@@ -2179,7 +2002,7 @@
                     <a:bodyPr/>
                     <a:lstStyle/>
                     <a:p>
-                      <a:pPr indent="0" marL="0">
+                      <a:pPr marL="0" indent="0">
                         <a:buNone/>
                       </a:pPr>
                       <a:r>
@@ -2242,6 +2065,11 @@
                     </a:solidFill>
                   </a:tcPr>
                 </a:tc>
+                <a:extLst>
+                  <a:ext uri="{0D108BD9-81ED-4DB2-BD59-A6C34878D82A}">
+                    <a16:rowId xmlns:a16="http://schemas.microsoft.com/office/drawing/2014/main" val="10000"/>
+                  </a:ext>
+                </a:extLst>
               </a:tr>
               <a:tr h="548640">
                 <a:tc>
@@ -2249,7 +2077,7 @@
                     <a:bodyPr/>
                     <a:lstStyle/>
                     <a:p>
-                      <a:pPr indent="0" marL="0">
+                      <a:pPr marL="0" indent="0">
                         <a:buNone/>
                       </a:pPr>
                       <a:r>
@@ -2317,7 +2145,7 @@
                     <a:bodyPr/>
                     <a:lstStyle/>
                     <a:p>
-                      <a:pPr indent="0" marL="0">
+                      <a:pPr marL="0" indent="0">
                         <a:buNone/>
                       </a:pPr>
                       <a:r>
@@ -2385,7 +2213,7 @@
                     <a:bodyPr/>
                     <a:lstStyle/>
                     <a:p>
-                      <a:pPr indent="0" marL="0">
+                      <a:pPr marL="0" indent="0">
                         <a:buNone/>
                       </a:pPr>
                       <a:r>
@@ -2453,7 +2281,7 @@
                     <a:bodyPr/>
                     <a:lstStyle/>
                     <a:p>
-                      <a:pPr indent="0" marL="0">
+                      <a:pPr marL="0" indent="0">
                         <a:buNone/>
                       </a:pPr>
                       <a:r>
@@ -2516,6 +2344,11 @@
                     </a:solidFill>
                   </a:tcPr>
                 </a:tc>
+                <a:extLst>
+                  <a:ext uri="{0D108BD9-81ED-4DB2-BD59-A6C34878D82A}">
+                    <a16:rowId xmlns:a16="http://schemas.microsoft.com/office/drawing/2014/main" val="10001"/>
+                  </a:ext>
+                </a:extLst>
               </a:tr>
               <a:tr h="548640">
                 <a:tc>
@@ -2523,7 +2356,7 @@
                     <a:bodyPr/>
                     <a:lstStyle/>
                     <a:p>
-                      <a:pPr indent="0" marL="0">
+                      <a:pPr marL="0" indent="0">
                         <a:buNone/>
                       </a:pPr>
                       <a:r>
@@ -2591,7 +2424,7 @@
                     <a:bodyPr/>
                     <a:lstStyle/>
                     <a:p>
-                      <a:pPr indent="0" marL="0">
+                      <a:pPr marL="0" indent="0">
                         <a:buNone/>
                       </a:pPr>
                       <a:r>
@@ -2659,7 +2492,7 @@
                     <a:bodyPr/>
                     <a:lstStyle/>
                     <a:p>
-                      <a:pPr indent="0" marL="0">
+                      <a:pPr marL="0" indent="0">
                         <a:buNone/>
                       </a:pPr>
                       <a:r>
@@ -2727,7 +2560,7 @@
                     <a:bodyPr/>
                     <a:lstStyle/>
                     <a:p>
-                      <a:pPr indent="0" marL="0">
+                      <a:pPr marL="0" indent="0">
                         <a:buNone/>
                       </a:pPr>
                       <a:r>
@@ -2790,6 +2623,11 @@
                     </a:solidFill>
                   </a:tcPr>
                 </a:tc>
+                <a:extLst>
+                  <a:ext uri="{0D108BD9-81ED-4DB2-BD59-A6C34878D82A}">
+                    <a16:rowId xmlns:a16="http://schemas.microsoft.com/office/drawing/2014/main" val="10002"/>
+                  </a:ext>
+                </a:extLst>
               </a:tr>
               <a:tr h="548640">
                 <a:tc>
@@ -2797,7 +2635,7 @@
                     <a:bodyPr/>
                     <a:lstStyle/>
                     <a:p>
-                      <a:pPr indent="0" marL="0">
+                      <a:pPr marL="0" indent="0">
                         <a:buNone/>
                       </a:pPr>
                       <a:r>
@@ -2865,7 +2703,7 @@
                     <a:bodyPr/>
                     <a:lstStyle/>
                     <a:p>
-                      <a:pPr indent="0" marL="0">
+                      <a:pPr marL="0" indent="0">
                         <a:buNone/>
                       </a:pPr>
                       <a:r>
@@ -2933,7 +2771,7 @@
                     <a:bodyPr/>
                     <a:lstStyle/>
                     <a:p>
-                      <a:pPr indent="0" marL="0">
+                      <a:pPr marL="0" indent="0">
                         <a:buNone/>
                       </a:pPr>
                       <a:r>
@@ -3001,7 +2839,7 @@
                     <a:bodyPr/>
                     <a:lstStyle/>
                     <a:p>
-                      <a:pPr indent="0" marL="0">
+                      <a:pPr marL="0" indent="0">
                         <a:buNone/>
                       </a:pPr>
                       <a:r>
@@ -3064,6 +2902,11 @@
                     </a:solidFill>
                   </a:tcPr>
                 </a:tc>
+                <a:extLst>
+                  <a:ext uri="{0D108BD9-81ED-4DB2-BD59-A6C34878D82A}">
+                    <a16:rowId xmlns:a16="http://schemas.microsoft.com/office/drawing/2014/main" val="10003"/>
+                  </a:ext>
+                </a:extLst>
               </a:tr>
             </a:tbl>
           </a:graphicData>
@@ -3085,15 +2928,27 @@
         </p:nvGraphicFramePr>
         <p:xfrm>
           <a:off x="548640" y="3703320"/>
-          <a:ext cx="11091672" cy="914400"/>
+          <a:ext cx="11091672" cy="2057400"/>
         </p:xfrm>
         <a:graphic>
           <a:graphicData uri="http://schemas.openxmlformats.org/drawingml/2006/table">
             <a:tbl>
               <a:tblPr/>
               <a:tblGrid>
-                <a:gridCol w="1645920"/>
-                <a:gridCol w="9445752"/>
+                <a:gridCol w="1645920">
+                  <a:extLst>
+                    <a:ext uri="{9D8B030D-6E8A-4147-A177-3AD203B41FA5}">
+                      <a16:colId xmlns:a16="http://schemas.microsoft.com/office/drawing/2014/main" val="20000"/>
+                    </a:ext>
+                  </a:extLst>
+                </a:gridCol>
+                <a:gridCol w="9445752">
+                  <a:extLst>
+                    <a:ext uri="{9D8B030D-6E8A-4147-A177-3AD203B41FA5}">
+                      <a16:colId xmlns:a16="http://schemas.microsoft.com/office/drawing/2014/main" val="20001"/>
+                    </a:ext>
+                  </a:extLst>
+                </a:gridCol>
               </a:tblGrid>
               <a:tr h="411480">
                 <a:tc>
@@ -3101,7 +2956,7 @@
                     <a:bodyPr/>
                     <a:lstStyle/>
                     <a:p>
-                      <a:pPr indent="0" marL="0">
+                      <a:pPr marL="0" indent="0">
                         <a:buNone/>
                       </a:pPr>
                       <a:r>
@@ -3169,7 +3024,7 @@
                     <a:bodyPr/>
                     <a:lstStyle/>
                     <a:p>
-                      <a:pPr indent="0" marL="0">
+                      <a:pPr marL="0" indent="0">
                         <a:buNone/>
                       </a:pPr>
                       <a:r>
@@ -3232,6 +3087,11 @@
                     </a:solidFill>
                   </a:tcPr>
                 </a:tc>
+                <a:extLst>
+                  <a:ext uri="{0D108BD9-81ED-4DB2-BD59-A6C34878D82A}">
+                    <a16:rowId xmlns:a16="http://schemas.microsoft.com/office/drawing/2014/main" val="10000"/>
+                  </a:ext>
+                </a:extLst>
               </a:tr>
               <a:tr h="411480">
                 <a:tc>
@@ -3239,7 +3099,7 @@
                     <a:bodyPr/>
                     <a:lstStyle/>
                     <a:p>
-                      <a:pPr indent="0" marL="0">
+                      <a:pPr marL="0" indent="0">
                         <a:buNone/>
                       </a:pPr>
                       <a:r>
@@ -3307,7 +3167,7 @@
                     <a:bodyPr/>
                     <a:lstStyle/>
                     <a:p>
-                      <a:pPr indent="0" marL="0">
+                      <a:pPr marL="0" indent="0">
                         <a:buNone/>
                       </a:pPr>
                       <a:r>
@@ -3370,6 +3230,11 @@
                     </a:solidFill>
                   </a:tcPr>
                 </a:tc>
+                <a:extLst>
+                  <a:ext uri="{0D108BD9-81ED-4DB2-BD59-A6C34878D82A}">
+                    <a16:rowId xmlns:a16="http://schemas.microsoft.com/office/drawing/2014/main" val="10001"/>
+                  </a:ext>
+                </a:extLst>
               </a:tr>
               <a:tr h="411480">
                 <a:tc>
@@ -3377,7 +3242,7 @@
                     <a:bodyPr/>
                     <a:lstStyle/>
                     <a:p>
-                      <a:pPr indent="0" marL="0">
+                      <a:pPr marL="0" indent="0">
                         <a:buNone/>
                       </a:pPr>
                       <a:r>
@@ -3445,7 +3310,7 @@
                     <a:bodyPr/>
                     <a:lstStyle/>
                     <a:p>
-                      <a:pPr indent="0" marL="0">
+                      <a:pPr marL="0" indent="0">
                         <a:buNone/>
                       </a:pPr>
                       <a:r>
@@ -3508,6 +3373,11 @@
                     </a:solidFill>
                   </a:tcPr>
                 </a:tc>
+                <a:extLst>
+                  <a:ext uri="{0D108BD9-81ED-4DB2-BD59-A6C34878D82A}">
+                    <a16:rowId xmlns:a16="http://schemas.microsoft.com/office/drawing/2014/main" val="10002"/>
+                  </a:ext>
+                </a:extLst>
               </a:tr>
               <a:tr h="411480">
                 <a:tc>
@@ -3515,7 +3385,7 @@
                     <a:bodyPr/>
                     <a:lstStyle/>
                     <a:p>
-                      <a:pPr indent="0" marL="0">
+                      <a:pPr marL="0" indent="0">
                         <a:buNone/>
                       </a:pPr>
                       <a:r>
@@ -3583,7 +3453,7 @@
                     <a:bodyPr/>
                     <a:lstStyle/>
                     <a:p>
-                      <a:pPr indent="0" marL="0">
+                      <a:pPr marL="0" indent="0">
                         <a:buNone/>
                       </a:pPr>
                       <a:r>
@@ -3646,6 +3516,11 @@
                     </a:solidFill>
                   </a:tcPr>
                 </a:tc>
+                <a:extLst>
+                  <a:ext uri="{0D108BD9-81ED-4DB2-BD59-A6C34878D82A}">
+                    <a16:rowId xmlns:a16="http://schemas.microsoft.com/office/drawing/2014/main" val="10003"/>
+                  </a:ext>
+                </a:extLst>
               </a:tr>
               <a:tr h="411480">
                 <a:tc>
@@ -3653,7 +3528,7 @@
                     <a:bodyPr/>
                     <a:lstStyle/>
                     <a:p>
-                      <a:pPr indent="0" marL="0">
+                      <a:pPr marL="0" indent="0">
                         <a:buNone/>
                       </a:pPr>
                       <a:r>
@@ -3721,7 +3596,7 @@
                     <a:bodyPr/>
                     <a:lstStyle/>
                     <a:p>
-                      <a:pPr indent="0" marL="0">
+                      <a:pPr marL="0" indent="0">
                         <a:buNone/>
                       </a:pPr>
                       <a:r>
@@ -3784,6 +3659,11 @@
                     </a:solidFill>
                   </a:tcPr>
                 </a:tc>
+                <a:extLst>
+                  <a:ext uri="{0D108BD9-81ED-4DB2-BD59-A6C34878D82A}">
+                    <a16:rowId xmlns:a16="http://schemas.microsoft.com/office/drawing/2014/main" val="10004"/>
+                  </a:ext>
+                </a:extLst>
               </a:tr>
             </a:tbl>
           </a:graphicData>
@@ -3805,6 +3685,7 @@
         <a:solidFill>
           <a:srgbClr val="FFFFFF"/>
         </a:solidFill>
+        <a:effectLst/>
       </p:bgPr>
     </p:bg>
     <p:spTree>
@@ -3842,7 +3723,7 @@
           <a:bodyPr wrap="square" lIns="0" tIns="0" rIns="0" bIns="0" rtlCol="0" anchor="ctr"/>
           <a:lstStyle/>
           <a:p>
-            <a:pPr indent="0" marL="0">
+            <a:pPr marL="0" indent="0">
               <a:buNone/>
             </a:pPr>
             <a:r>
@@ -3881,7 +3762,7 @@
           <a:bodyPr wrap="square" lIns="0" tIns="0" rIns="0" bIns="0" rtlCol="0" anchor="ctr"/>
           <a:lstStyle/>
           <a:p>
-            <a:pPr indent="0" marL="0">
+            <a:pPr marL="0" indent="0">
               <a:buNone/>
             </a:pPr>
             <a:r>
@@ -3920,7 +3801,7 @@
           <a:bodyPr wrap="square" lIns="0" tIns="0" rIns="0" bIns="0" rtlCol="0" anchor="ctr"/>
           <a:lstStyle/>
           <a:p>
-            <a:pPr algn="r" indent="0" marL="0">
+            <a:pPr marL="0" indent="0" algn="r">
               <a:buNone/>
             </a:pPr>
             <a:r>
@@ -3964,6 +3845,13 @@
             <a:prstDash val="solid"/>
           </a:ln>
         </p:spPr>
+        <p:txBody>
+          <a:bodyPr/>
+          <a:lstStyle/>
+          <a:p>
+            <a:endParaRPr lang="en-GB"/>
+          </a:p>
+        </p:txBody>
       </p:sp>
       <p:sp>
         <p:nvSpPr>
@@ -3986,7 +3874,7 @@
           <a:bodyPr wrap="square" lIns="0" tIns="0" rIns="0" bIns="0" rtlCol="0" anchor="ctr"/>
           <a:lstStyle/>
           <a:p>
-            <a:pPr indent="0" marL="0">
+            <a:pPr marL="0" indent="0">
               <a:buNone/>
             </a:pPr>
             <a:r>
@@ -4003,7 +3891,7 @@
             <a:endParaRPr lang="en-US" sz="1500" dirty="0"/>
           </a:p>
           <a:p>
-            <a:pPr indent="0" marL="0">
+            <a:pPr marL="0" indent="0">
               <a:buNone/>
             </a:pPr>
             <a:r>
@@ -4020,7 +3908,7 @@
             <a:endParaRPr lang="en-US" sz="1500" dirty="0"/>
           </a:p>
           <a:p>
-            <a:pPr indent="0" marL="0">
+            <a:pPr marL="0" indent="0">
               <a:buNone/>
             </a:pPr>
             <a:r>
@@ -4037,7 +3925,7 @@
             <a:endParaRPr lang="en-US" sz="1500" dirty="0"/>
           </a:p>
           <a:p>
-            <a:pPr indent="0" marL="0">
+            <a:pPr marL="0" indent="0">
               <a:buNone/>
             </a:pPr>
             <a:r>
@@ -4177,6 +4065,7 @@
         <a:solidFill>
           <a:srgbClr val="0B3C5D"/>
         </a:solidFill>
+        <a:effectLst/>
       </p:bgPr>
     </p:bg>
     <p:spTree>
@@ -4214,7 +4103,7 @@
           <a:bodyPr wrap="square" lIns="0" tIns="0" rIns="0" bIns="0" rtlCol="0" anchor="ctr"/>
           <a:lstStyle/>
           <a:p>
-            <a:pPr indent="0" marL="0">
+            <a:pPr marL="0" indent="0">
               <a:buNone/>
             </a:pPr>
             <a:r>
@@ -4253,7 +4142,7 @@
           <a:bodyPr wrap="square" lIns="0" tIns="0" rIns="0" bIns="0" rtlCol="0" anchor="ctr"/>
           <a:lstStyle/>
           <a:p>
-            <a:pPr indent="0" marL="0">
+            <a:pPr marL="0" indent="0">
               <a:buNone/>
             </a:pPr>
             <a:r>
@@ -4292,7 +4181,7 @@
           <a:bodyPr wrap="square" lIns="0" tIns="0" rIns="0" bIns="0" rtlCol="0" anchor="ctr"/>
           <a:lstStyle/>
           <a:p>
-            <a:pPr indent="0" marL="0">
+            <a:pPr marL="0" indent="0">
               <a:buNone/>
             </a:pPr>
             <a:r>
@@ -4331,7 +4220,7 @@
           <a:bodyPr wrap="square" lIns="0" tIns="0" rIns="0" bIns="0" rtlCol="0" anchor="t"/>
           <a:lstStyle/>
           <a:p>
-            <a:pPr indent="0" marL="0">
+            <a:pPr marL="0" indent="0">
               <a:spcAft>
                 <a:spcPts val="600"/>
               </a:spcAft>
@@ -4351,7 +4240,7 @@
             <a:endParaRPr lang="en-US" sz="1400" dirty="0"/>
           </a:p>
           <a:p>
-            <a:pPr indent="0" marL="0">
+            <a:pPr marL="0" indent="0">
               <a:spcAft>
                 <a:spcPts val="600"/>
               </a:spcAft>
@@ -4371,7 +4260,7 @@
             <a:endParaRPr lang="en-US" sz="1400" dirty="0"/>
           </a:p>
           <a:p>
-            <a:pPr indent="0" marL="0">
+            <a:pPr marL="0" indent="0">
               <a:spcAft>
                 <a:spcPts val="600"/>
               </a:spcAft>
@@ -4693,4 +4582,319 @@
     </a:ext>
   </a:extLst>
 </a:theme>
+</file>
+
+<file path=ppt/theme/theme2.xml><?xml version="1.0" encoding="utf-8"?>
+<a:theme xmlns:a="http://schemas.openxmlformats.org/drawingml/2006/main" name="Thème Office">
+  <a:themeElements>
+    <a:clrScheme name="Office">
+      <a:dk1>
+        <a:sysClr val="windowText" lastClr="000000"/>
+      </a:dk1>
+      <a:lt1>
+        <a:sysClr val="window" lastClr="FFFFFF"/>
+      </a:lt1>
+      <a:dk2>
+        <a:srgbClr val="0E2841"/>
+      </a:dk2>
+      <a:lt2>
+        <a:srgbClr val="E8E8E8"/>
+      </a:lt2>
+      <a:accent1>
+        <a:srgbClr val="156082"/>
+      </a:accent1>
+      <a:accent2>
+        <a:srgbClr val="E97132"/>
+      </a:accent2>
+      <a:accent3>
+        <a:srgbClr val="196B24"/>
+      </a:accent3>
+      <a:accent4>
+        <a:srgbClr val="0F9ED5"/>
+      </a:accent4>
+      <a:accent5>
+        <a:srgbClr val="A02B93"/>
+      </a:accent5>
+      <a:accent6>
+        <a:srgbClr val="4EA72E"/>
+      </a:accent6>
+      <a:hlink>
+        <a:srgbClr val="467886"/>
+      </a:hlink>
+      <a:folHlink>
+        <a:srgbClr val="96607D"/>
+      </a:folHlink>
+    </a:clrScheme>
+    <a:fontScheme name="Office">
+      <a:majorFont>
+        <a:latin typeface="Aptos Display" panose="02110004020202020204"/>
+        <a:ea typeface=""/>
+        <a:cs typeface=""/>
+        <a:font script="Jpan" typeface="游ゴシック Light"/>
+        <a:font script="Hang" typeface="맑은 고딕"/>
+        <a:font script="Hans" typeface="等线 Light"/>
+        <a:font script="Hant" typeface="新細明體"/>
+        <a:font script="Arab" typeface="Times New Roman"/>
+        <a:font script="Hebr" typeface="Times New Roman"/>
+        <a:font script="Thai" typeface="Angsana New"/>
+        <a:font script="Ethi" typeface="Nyala"/>
+        <a:font script="Beng" typeface="Vrinda"/>
+        <a:font script="Gujr" typeface="Shruti"/>
+        <a:font script="Khmr" typeface="MoolBoran"/>
+        <a:font script="Knda" typeface="Tunga"/>
+        <a:font script="Guru" typeface="Raavi"/>
+        <a:font script="Cans" typeface="Euphemia"/>
+        <a:font script="Cher" typeface="Plantagenet Cherokee"/>
+        <a:font script="Yiii" typeface="Microsoft Yi Baiti"/>
+        <a:font script="Tibt" typeface="Microsoft Himalaya"/>
+        <a:font script="Thaa" typeface="MV Boli"/>
+        <a:font script="Deva" typeface="Mangal"/>
+        <a:font script="Telu" typeface="Gautami"/>
+        <a:font script="Taml" typeface="Latha"/>
+        <a:font script="Syrc" typeface="Estrangelo Edessa"/>
+        <a:font script="Orya" typeface="Kalinga"/>
+        <a:font script="Mlym" typeface="Kartika"/>
+        <a:font script="Laoo" typeface="DokChampa"/>
+        <a:font script="Sinh" typeface="Iskoola Pota"/>
+        <a:font script="Mong" typeface="Mongolian Baiti"/>
+        <a:font script="Viet" typeface="Times New Roman"/>
+        <a:font script="Uigh" typeface="Microsoft Uighur"/>
+        <a:font script="Geor" typeface="Sylfaen"/>
+        <a:font script="Armn" typeface="Arial"/>
+        <a:font script="Bugi" typeface="Leelawadee UI"/>
+        <a:font script="Bopo" typeface="Microsoft JhengHei"/>
+        <a:font script="Java" typeface="Javanese Text"/>
+        <a:font script="Lisu" typeface="Segoe UI"/>
+        <a:font script="Mymr" typeface="Myanmar Text"/>
+        <a:font script="Nkoo" typeface="Ebrima"/>
+        <a:font script="Olck" typeface="Nirmala UI"/>
+        <a:font script="Osma" typeface="Ebrima"/>
+        <a:font script="Phag" typeface="Phagspa"/>
+        <a:font script="Syrn" typeface="Estrangelo Edessa"/>
+        <a:font script="Syrj" typeface="Estrangelo Edessa"/>
+        <a:font script="Syre" typeface="Estrangelo Edessa"/>
+        <a:font script="Sora" typeface="Nirmala UI"/>
+        <a:font script="Tale" typeface="Microsoft Tai Le"/>
+        <a:font script="Talu" typeface="Microsoft New Tai Lue"/>
+        <a:font script="Tfng" typeface="Ebrima"/>
+      </a:majorFont>
+      <a:minorFont>
+        <a:latin typeface="Aptos" panose="02110004020202020204"/>
+        <a:ea typeface=""/>
+        <a:cs typeface=""/>
+        <a:font script="Jpan" typeface="游ゴシック"/>
+        <a:font script="Hang" typeface="맑은 고딕"/>
+        <a:font script="Hans" typeface="等线"/>
+        <a:font script="Hant" typeface="新細明體"/>
+        <a:font script="Arab" typeface="Arial"/>
+        <a:font script="Hebr" typeface="Arial"/>
+        <a:font script="Thai" typeface="Cordia New"/>
+        <a:font script="Ethi" typeface="Nyala"/>
+        <a:font script="Beng" typeface="Vrinda"/>
+        <a:font script="Gujr" typeface="Shruti"/>
+        <a:font script="Khmr" typeface="DaunPenh"/>
+        <a:font script="Knda" typeface="Tunga"/>
+        <a:font script="Guru" typeface="Raavi"/>
+        <a:font script="Cans" typeface="Euphemia"/>
+        <a:font script="Cher" typeface="Plantagenet Cherokee"/>
+        <a:font script="Yiii" typeface="Microsoft Yi Baiti"/>
+        <a:font script="Tibt" typeface="Microsoft Himalaya"/>
+        <a:font script="Thaa" typeface="MV Boli"/>
+        <a:font script="Deva" typeface="Mangal"/>
+        <a:font script="Telu" typeface="Gautami"/>
+        <a:font script="Taml" typeface="Latha"/>
+        <a:font script="Syrc" typeface="Estrangelo Edessa"/>
+        <a:font script="Orya" typeface="Kalinga"/>
+        <a:font script="Mlym" typeface="Kartika"/>
+        <a:font script="Laoo" typeface="DokChampa"/>
+        <a:font script="Sinh" typeface="Iskoola Pota"/>
+        <a:font script="Mong" typeface="Mongolian Baiti"/>
+        <a:font script="Viet" typeface="Arial"/>
+        <a:font script="Uigh" typeface="Microsoft Uighur"/>
+        <a:font script="Geor" typeface="Sylfaen"/>
+        <a:font script="Armn" typeface="Arial"/>
+        <a:font script="Bugi" typeface="Leelawadee UI"/>
+        <a:font script="Bopo" typeface="Microsoft JhengHei"/>
+        <a:font script="Java" typeface="Javanese Text"/>
+        <a:font script="Lisu" typeface="Segoe UI"/>
+        <a:font script="Mymr" typeface="Myanmar Text"/>
+        <a:font script="Nkoo" typeface="Ebrima"/>
+        <a:font script="Olck" typeface="Nirmala UI"/>
+        <a:font script="Osma" typeface="Ebrima"/>
+        <a:font script="Phag" typeface="Phagspa"/>
+        <a:font script="Syrn" typeface="Estrangelo Edessa"/>
+        <a:font script="Syrj" typeface="Estrangelo Edessa"/>
+        <a:font script="Syre" typeface="Estrangelo Edessa"/>
+        <a:font script="Sora" typeface="Nirmala UI"/>
+        <a:font script="Tale" typeface="Microsoft Tai Le"/>
+        <a:font script="Talu" typeface="Microsoft New Tai Lue"/>
+        <a:font script="Tfng" typeface="Ebrima"/>
+      </a:minorFont>
+    </a:fontScheme>
+    <a:fmtScheme name="Office">
+      <a:fillStyleLst>
+        <a:solidFill>
+          <a:schemeClr val="phClr"/>
+        </a:solidFill>
+        <a:gradFill rotWithShape="1">
+          <a:gsLst>
+            <a:gs pos="0">
+              <a:schemeClr val="phClr">
+                <a:lumMod val="110000"/>
+                <a:satMod val="105000"/>
+                <a:tint val="67000"/>
+              </a:schemeClr>
+            </a:gs>
+            <a:gs pos="50000">
+              <a:schemeClr val="phClr">
+                <a:lumMod val="105000"/>
+                <a:satMod val="103000"/>
+                <a:tint val="73000"/>
+              </a:schemeClr>
+            </a:gs>
+            <a:gs pos="100000">
+              <a:schemeClr val="phClr">
+                <a:lumMod val="105000"/>
+                <a:satMod val="109000"/>
+                <a:tint val="81000"/>
+              </a:schemeClr>
+            </a:gs>
+          </a:gsLst>
+          <a:lin ang="5400000" scaled="0"/>
+        </a:gradFill>
+        <a:gradFill rotWithShape="1">
+          <a:gsLst>
+            <a:gs pos="0">
+              <a:schemeClr val="phClr">
+                <a:satMod val="103000"/>
+                <a:lumMod val="102000"/>
+                <a:tint val="94000"/>
+              </a:schemeClr>
+            </a:gs>
+            <a:gs pos="50000">
+              <a:schemeClr val="phClr">
+                <a:satMod val="110000"/>
+                <a:lumMod val="100000"/>
+                <a:shade val="100000"/>
+              </a:schemeClr>
+            </a:gs>
+            <a:gs pos="100000">
+              <a:schemeClr val="phClr">
+                <a:lumMod val="99000"/>
+                <a:satMod val="120000"/>
+                <a:shade val="78000"/>
+              </a:schemeClr>
+            </a:gs>
+          </a:gsLst>
+          <a:lin ang="5400000" scaled="0"/>
+        </a:gradFill>
+      </a:fillStyleLst>
+      <a:lnStyleLst>
+        <a:ln w="12700" cap="flat" cmpd="sng" algn="ctr">
+          <a:solidFill>
+            <a:schemeClr val="phClr"/>
+          </a:solidFill>
+          <a:prstDash val="solid"/>
+          <a:miter lim="800000"/>
+        </a:ln>
+        <a:ln w="19050" cap="flat" cmpd="sng" algn="ctr">
+          <a:solidFill>
+            <a:schemeClr val="phClr"/>
+          </a:solidFill>
+          <a:prstDash val="solid"/>
+          <a:miter lim="800000"/>
+        </a:ln>
+        <a:ln w="25400" cap="flat" cmpd="sng" algn="ctr">
+          <a:solidFill>
+            <a:schemeClr val="phClr"/>
+          </a:solidFill>
+          <a:prstDash val="solid"/>
+          <a:miter lim="800000"/>
+        </a:ln>
+      </a:lnStyleLst>
+      <a:effectStyleLst>
+        <a:effectStyle>
+          <a:effectLst/>
+        </a:effectStyle>
+        <a:effectStyle>
+          <a:effectLst/>
+        </a:effectStyle>
+        <a:effectStyle>
+          <a:effectLst>
+            <a:outerShdw blurRad="57150" dist="19050" dir="5400000" algn="ctr" rotWithShape="0">
+              <a:srgbClr val="000000">
+                <a:alpha val="63000"/>
+              </a:srgbClr>
+            </a:outerShdw>
+          </a:effectLst>
+        </a:effectStyle>
+      </a:effectStyleLst>
+      <a:bgFillStyleLst>
+        <a:solidFill>
+          <a:schemeClr val="phClr"/>
+        </a:solidFill>
+        <a:solidFill>
+          <a:schemeClr val="phClr">
+            <a:tint val="95000"/>
+            <a:satMod val="170000"/>
+          </a:schemeClr>
+        </a:solidFill>
+        <a:gradFill rotWithShape="1">
+          <a:gsLst>
+            <a:gs pos="0">
+              <a:schemeClr val="phClr">
+                <a:tint val="93000"/>
+                <a:satMod val="150000"/>
+                <a:shade val="98000"/>
+                <a:lumMod val="102000"/>
+              </a:schemeClr>
+            </a:gs>
+            <a:gs pos="50000">
+              <a:schemeClr val="phClr">
+                <a:tint val="98000"/>
+                <a:satMod val="130000"/>
+                <a:shade val="90000"/>
+                <a:lumMod val="103000"/>
+              </a:schemeClr>
+            </a:gs>
+            <a:gs pos="100000">
+              <a:schemeClr val="phClr">
+                <a:shade val="63000"/>
+                <a:satMod val="120000"/>
+              </a:schemeClr>
+            </a:gs>
+          </a:gsLst>
+          <a:lin ang="5400000" scaled="0"/>
+        </a:gradFill>
+      </a:bgFillStyleLst>
+    </a:fmtScheme>
+  </a:themeElements>
+  <a:objectDefaults>
+    <a:lnDef>
+      <a:spPr/>
+      <a:bodyPr/>
+      <a:lstStyle/>
+      <a:style>
+        <a:lnRef idx="2">
+          <a:schemeClr val="accent1"/>
+        </a:lnRef>
+        <a:fillRef idx="0">
+          <a:schemeClr val="accent1"/>
+        </a:fillRef>
+        <a:effectRef idx="1">
+          <a:schemeClr val="accent1"/>
+        </a:effectRef>
+        <a:fontRef idx="minor">
+          <a:schemeClr val="tx1"/>
+        </a:fontRef>
+      </a:style>
+    </a:lnDef>
+  </a:objectDefaults>
+  <a:extraClrSchemeLst/>
+  <a:extLst>
+    <a:ext uri="{05A4C25C-085E-4340-85A3-A5531E510DB2}">
+      <thm15:themeFamily xmlns:thm15="http://schemas.microsoft.com/office/thememl/2012/main" name="Office Theme" id="{2E142A2C-CD16-42D6-873A-C26D2A0506FA}" vid="{1BDDFF52-6CD6-40A5-AB3C-68EB2F1E4D0A}"/>
+    </a:ext>
+  </a:extLst>
+</a:theme>
 </file>